--- a/Multimodal-AI-ATAL-FDP-Deck.pptx
+++ b/Multimodal-AI-ATAL-FDP-Deck.pptx
@@ -44,6 +44,7 @@
     <p:sldId id="281" r:id="rId35"/>
     <p:sldId id="282" r:id="rId36"/>
     <p:sldId id="293" r:id="rId37"/>
+    <p:sldId id="295" r:id="rId43"/>
   </p:sldIdLst>
   <p:sldSz cx="12192000" cy="6858000"/>
   <p:notesSz cx="6858000" cy="12192000"/>
@@ -14265,7 +14266,7 @@
                 <a:ea typeface="Calibri" pitchFamily="34" charset="-122"/>
                 <a:cs typeface="Calibri" pitchFamily="34" charset="-120"/>
               </a:rPr>
-              <a:t>Photo and sampled frames to base64, audio to a transcript, CSV to a table</a:t>
+              <a:t>Photo and sampled frames as image input, audio as audio or transcript, CSV as a table</a:t>
             </a:r>
             <a:endParaRPr lang="en-US" sz="900" dirty="0"/>
           </a:p>
@@ -14969,7 +14970,7 @@
                 <a:ea typeface="Calibri" pitchFamily="34" charset="-122"/>
                 <a:cs typeface="Calibri" pitchFamily="34" charset="-120"/>
               </a:rPr>
-              <a:t>No OCR engine. No video classifier. No separate speech system. One request where the 2019 pipeline needed eleven components.</a:t>
+              <a:t>No OCR engine. No video classifier. No four pipelines to stitch together. One request where the 2019 pipeline needed eleven components.</a:t>
             </a:r>
             <a:endParaRPr lang="en-US" sz="1400" dirty="0"/>
           </a:p>
@@ -17844,7 +17845,7 @@
         <p:spPr>
           <a:xfrm>
             <a:off x="4937760" y="1965960"/>
-            <a:ext cx="6309360" cy="658368"/>
+            <a:ext cx="4389120" cy="658368"/>
           </a:xfrm>
           <a:prstGeom prst="rect">
             <a:avLst/>
@@ -17990,7 +17991,7 @@
         <p:spPr>
           <a:xfrm>
             <a:off x="4937760" y="2743200"/>
-            <a:ext cx="6309360" cy="658368"/>
+            <a:ext cx="4389120" cy="658368"/>
           </a:xfrm>
           <a:prstGeom prst="rect">
             <a:avLst/>
@@ -18136,7 +18137,7 @@
         <p:spPr>
           <a:xfrm>
             <a:off x="4937760" y="3520440"/>
-            <a:ext cx="6309360" cy="658368"/>
+            <a:ext cx="4389120" cy="658368"/>
           </a:xfrm>
           <a:prstGeom prst="rect">
             <a:avLst/>
@@ -18282,7 +18283,7 @@
         <p:spPr>
           <a:xfrm>
             <a:off x="4937760" y="4297680"/>
-            <a:ext cx="6309360" cy="658368"/>
+            <a:ext cx="4389120" cy="658368"/>
           </a:xfrm>
           <a:prstGeom prst="rect">
             <a:avLst/>
@@ -18428,7 +18429,7 @@
         <p:spPr>
           <a:xfrm>
             <a:off x="4937760" y="5074920"/>
-            <a:ext cx="6309360" cy="658368"/>
+            <a:ext cx="4389120" cy="658368"/>
           </a:xfrm>
           <a:prstGeom prst="rect">
             <a:avLst/>
@@ -18494,6 +18495,240 @@
               <a:t>Notice that the top two need almost no GPU. A good dataset paper outlives most model papers.</a:t>
             </a:r>
             <a:endParaRPr lang="en-US" sz="1400" dirty="0"/>
+          </a:p>
+        </p:txBody>
+      </p:sp>
+      <p:sp>
+        <p:nvSpPr>
+          <p:cNvPr id="8" name="Text 6"/>
+          <p:cNvSpPr/>
+          <p:nvPr/>
+        </p:nvSpPr>
+        <p:spPr>
+          <a:xfrm>
+            <a:off x="9540240" y="1965960"/>
+            <a:ext cx="1706880" cy="658368"/>
+          </a:xfrm>
+          <a:prstGeom prst="rect">
+            <a:avLst/>
+          </a:prstGeom>
+          <a:noFill/>
+          <a:ln/>
+        </p:spPr>
+        <p:txBody>
+          <a:bodyPr wrap="square" lIns="0" tIns="0" rIns="0" bIns="0" rtlCol="0" anchor="ctr"/>
+          <a:lstStyle/>
+          <a:p>
+            <a:pPr marL="0" indent="0">
+              <a:buNone/>
+            </a:pPr>
+            <a:r>
+              <a:rPr lang="en-US" sz="1000" dirty="0">
+                <a:solidFill>
+                  <a:srgbClr val="0E1524"/>
+                </a:solidFill>
+                <a:latin typeface="Calibri" pitchFamily="34" charset="0"/>
+                <a:ea typeface="Calibri" pitchFamily="34" charset="-122"/>
+                <a:cs typeface="Calibri" pitchFamily="34" charset="-120"/>
+              </a:rPr>
+              <a:t>Coverage, difficulty, agreement</a:t>
+            </a:r>
+            <a:endParaRPr lang="en-US" sz="1250" dirty="0"/>
+          </a:p>
+        </p:txBody>
+      </p:sp>
+      <p:sp>
+        <p:nvSpPr>
+          <p:cNvPr id="12" name="Text 10"/>
+          <p:cNvSpPr/>
+          <p:nvPr/>
+        </p:nvSpPr>
+        <p:spPr>
+          <a:xfrm>
+            <a:off x="9540240" y="2743200"/>
+            <a:ext cx="1706880" cy="658368"/>
+          </a:xfrm>
+          <a:prstGeom prst="rect">
+            <a:avLst/>
+          </a:prstGeom>
+          <a:noFill/>
+          <a:ln/>
+        </p:spPr>
+        <p:txBody>
+          <a:bodyPr wrap="square" lIns="0" tIns="0" rIns="0" bIns="0" rtlCol="0" anchor="ctr"/>
+          <a:lstStyle/>
+          <a:p>
+            <a:pPr marL="0" indent="0">
+              <a:buNone/>
+            </a:pPr>
+            <a:r>
+              <a:rPr lang="en-US" sz="1000" dirty="0">
+                <a:solidFill>
+                  <a:srgbClr val="0E1524"/>
+                </a:solidFill>
+                <a:latin typeface="Calibri" pitchFamily="34" charset="0"/>
+                <a:ea typeface="Calibri" pitchFamily="34" charset="-122"/>
+                <a:cs typeface="Calibri" pitchFamily="34" charset="-120"/>
+              </a:rPr>
+              <a:t>Field-level F1 by script</a:t>
+            </a:r>
+            <a:endParaRPr lang="en-US" sz="1250" dirty="0"/>
+          </a:p>
+        </p:txBody>
+      </p:sp>
+      <p:sp>
+        <p:nvSpPr>
+          <p:cNvPr id="16" name="Text 14"/>
+          <p:cNvSpPr/>
+          <p:nvPr/>
+        </p:nvSpPr>
+        <p:spPr>
+          <a:xfrm>
+            <a:off x="9540240" y="3520440"/>
+            <a:ext cx="1706880" cy="658368"/>
+          </a:xfrm>
+          <a:prstGeom prst="rect">
+            <a:avLst/>
+          </a:prstGeom>
+          <a:noFill/>
+          <a:ln/>
+        </p:spPr>
+        <p:txBody>
+          <a:bodyPr wrap="square" lIns="0" tIns="0" rIns="0" bIns="0" rtlCol="0" anchor="ctr"/>
+          <a:lstStyle/>
+          <a:p>
+            <a:pPr marL="0" indent="0">
+              <a:buNone/>
+            </a:pPr>
+            <a:r>
+              <a:rPr lang="en-US" sz="1000" dirty="0">
+                <a:solidFill>
+                  <a:srgbClr val="0E1524"/>
+                </a:solidFill>
+                <a:latin typeface="Calibri" pitchFamily="34" charset="0"/>
+                <a:ea typeface="Calibri" pitchFamily="34" charset="-122"/>
+                <a:cs typeface="Calibri" pitchFamily="34" charset="-120"/>
+              </a:rPr>
+              <a:t>ECE and selective risk</a:t>
+            </a:r>
+            <a:endParaRPr lang="en-US" sz="1250" dirty="0"/>
+          </a:p>
+        </p:txBody>
+      </p:sp>
+      <p:sp>
+        <p:nvSpPr>
+          <p:cNvPr id="20" name="Text 18"/>
+          <p:cNvSpPr/>
+          <p:nvPr/>
+        </p:nvSpPr>
+        <p:spPr>
+          <a:xfrm>
+            <a:off x="9540240" y="4297680"/>
+            <a:ext cx="1706880" cy="658368"/>
+          </a:xfrm>
+          <a:prstGeom prst="rect">
+            <a:avLst/>
+          </a:prstGeom>
+          <a:noFill/>
+          <a:ln/>
+        </p:spPr>
+        <p:txBody>
+          <a:bodyPr wrap="square" lIns="0" tIns="0" rIns="0" bIns="0" rtlCol="0" anchor="ctr"/>
+          <a:lstStyle/>
+          <a:p>
+            <a:pPr marL="0" indent="0">
+              <a:buNone/>
+            </a:pPr>
+            <a:r>
+              <a:rPr lang="en-US" sz="1000" dirty="0">
+                <a:solidFill>
+                  <a:srgbClr val="0E1524"/>
+                </a:solidFill>
+                <a:latin typeface="Calibri" pitchFamily="34" charset="0"/>
+                <a:ea typeface="Calibri" pitchFamily="34" charset="-122"/>
+                <a:cs typeface="Calibri" pitchFamily="34" charset="-120"/>
+              </a:rPr>
+              <a:t>Accuracy per token and rupee</a:t>
+            </a:r>
+            <a:endParaRPr lang="en-US" sz="1250" dirty="0"/>
+          </a:p>
+        </p:txBody>
+      </p:sp>
+      <p:sp>
+        <p:nvSpPr>
+          <p:cNvPr id="24" name="Text 22"/>
+          <p:cNvSpPr/>
+          <p:nvPr/>
+        </p:nvSpPr>
+        <p:spPr>
+          <a:xfrm>
+            <a:off x="9540240" y="5074920"/>
+            <a:ext cx="1706880" cy="658368"/>
+          </a:xfrm>
+          <a:prstGeom prst="rect">
+            <a:avLst/>
+          </a:prstGeom>
+          <a:noFill/>
+          <a:ln/>
+        </p:spPr>
+        <p:txBody>
+          <a:bodyPr wrap="square" lIns="0" tIns="0" rIns="0" bIns="0" rtlCol="0" anchor="ctr"/>
+          <a:lstStyle/>
+          <a:p>
+            <a:pPr marL="0" indent="0">
+              <a:buNone/>
+            </a:pPr>
+            <a:r>
+              <a:rPr lang="en-US" sz="1000" dirty="0">
+                <a:solidFill>
+                  <a:srgbClr val="0E1524"/>
+                </a:solidFill>
+                <a:latin typeface="Calibri" pitchFamily="34" charset="0"/>
+                <a:ea typeface="Calibri" pitchFamily="34" charset="-122"/>
+                <a:cs typeface="Calibri" pitchFamily="34" charset="-120"/>
+              </a:rPr>
+              <a:t>Expert agreement, localisation error</a:t>
+            </a:r>
+            <a:endParaRPr lang="en-US" sz="1250" dirty="0"/>
+          </a:p>
+        </p:txBody>
+      </p:sp>
+      <p:sp>
+        <p:nvSpPr>
+          <p:cNvPr id="2" name="Text 0"/>
+          <p:cNvSpPr/>
+          <p:nvPr/>
+        </p:nvSpPr>
+        <p:spPr>
+          <a:xfrm>
+            <a:off x="9540240" y="1755648"/>
+            <a:ext cx="1706880" cy="190000"/>
+          </a:xfrm>
+          <a:prstGeom prst="rect">
+            <a:avLst/>
+          </a:prstGeom>
+          <a:noFill/>
+          <a:ln/>
+        </p:spPr>
+        <p:txBody>
+          <a:bodyPr wrap="square" lIns="0" tIns="0" rIns="0" bIns="0" rtlCol="0" anchor="ctr"/>
+          <a:lstStyle/>
+          <a:p>
+            <a:pPr marL="0" indent="0">
+              <a:buNone/>
+            </a:pPr>
+            <a:r>
+              <a:rPr lang="en-US" sz="900" b="1" kern="0" spc="200" dirty="0">
+                <a:solidFill>
+                  <a:srgbClr val="FF6B4A"/>
+                </a:solidFill>
+                <a:latin typeface="Arial" pitchFamily="34" charset="0"/>
+                <a:ea typeface="Arial" pitchFamily="34" charset="-122"/>
+                <a:cs typeface="Arial" pitchFamily="34" charset="-120"/>
+              </a:rPr>
+              <a:t>HOW TO MEASURE</a:t>
+            </a:r>
+            <a:endParaRPr lang="en-US" sz="1100" dirty="0"/>
           </a:p>
         </p:txBody>
       </p:sp>
@@ -20659,8 +20894,8 @@
         </p:nvSpPr>
         <p:spPr>
           <a:xfrm>
-            <a:off x="640080" y="6382512"/>
-            <a:ext cx="10908792" cy="237744"/>
+            <a:off x="640080" y="6248400"/>
+            <a:ext cx="10908792" cy="400000"/>
           </a:xfrm>
           <a:prstGeom prst="rect">
             <a:avLst/>
@@ -20684,7 +20919,7 @@
                 <a:ea typeface="Calibri" pitchFamily="34" charset="-122"/>
                 <a:cs typeface="Calibri" pitchFamily="34" charset="-120"/>
               </a:rPr>
-              <a:t>Sources: MeitY Rajya Sabha reply, 9 Feb 2026; Union Budget 2026-27. Revised estimates were lower than the budget estimates shown (Rs 173 cr for FY25 and Rs 800 cr for FY26). Total mission outlay is Rs 10,371.92 crore over five years.</a:t>
+              <a:t>Figures current as of August 2026 - verify allocations and live call windows before presenting. Sources: MeitY Rajya Sabha reply, 9 Feb 2026; Union Budget 2026-27. Revised estimates were lower than the budget estimates shown (Rs 173 cr for FY25 and Rs 800 cr for FY26). Total mission outlay is Rs 10,371.92 crore over five years.</a:t>
             </a:r>
             <a:endParaRPr lang="en-US" sz="950" dirty="0"/>
           </a:p>
@@ -21314,7 +21549,7 @@
                 <a:ea typeface="Calibri" pitchFamily="34" charset="-122"/>
                 <a:cs typeface="Calibri" pitchFamily="34" charset="-120"/>
               </a:rPr>
-              <a:t>Over 38,000 GPUs across 15 empanelled providers, about Rs 65 per GPU-hour. Academic institutions are explicitly eligible. Register before you need it.</a:t>
+              <a:t>Over 38,000 GPUs across 14 empanelled providers, about Rs 65 per GPU-hour on average and Rs 92 for H100 class. Academic institutions are explicitly eligible. Register before you need it.</a:t>
             </a:r>
             <a:endParaRPr lang="en-US" sz="1250" dirty="0"/>
           </a:p>
@@ -21699,7 +21934,7 @@
                 <a:ea typeface="Calibri" pitchFamily="34" charset="-122"/>
                 <a:cs typeface="Calibri" pitchFamily="34" charset="-120"/>
               </a:rPr>
-              <a:t>Check anrfonline.in and indiaai.gov.in for live call windows - they open and close on short notice.</a:t>
+              <a:t>Check anrfonline.in and indiaai.gov.in for live call windows - they open and close on short notice. Scheme details and compute figures current as of August 2026.</a:t>
             </a:r>
             <a:endParaRPr lang="en-US" sz="1300" dirty="0"/>
           </a:p>
@@ -24014,6 +24249,23 @@
             </a:r>
             <a:endParaRPr lang="en-US" sz="1500" dirty="0"/>
           </a:p>
+          <a:p>
+            <a:pPr marL="0" indent="0" algn="l">
+              <a:buNone/>
+            </a:pPr>
+            <a:r>
+              <a:rPr lang="en-US" sz="1100" b="0" dirty="0">
+                <a:solidFill>
+                  <a:srgbClr val="8A94A6"/>
+                </a:solidFill>
+                <a:latin typeface="Arial" pitchFamily="34" charset="0"/>
+                <a:ea typeface="Arial" pitchFamily="34" charset="-122"/>
+                <a:cs typeface="Arial" pitchFamily="34" charset="-120"/>
+              </a:rPr>
+              <a:t>A dedicated OCR engine still wins on clean scans; the shared space wins the cross-modal questions.</a:t>
+            </a:r>
+            <a:endParaRPr lang="en-US" sz="1500" dirty="0"/>
+          </a:p>
         </p:txBody>
       </p:sp>
       <p:sp>
@@ -24931,7 +25183,7 @@
                 <a:ea typeface="Calibri" pitchFamily="34" charset="-122"/>
                 <a:cs typeface="Calibri" pitchFamily="34" charset="-120"/>
               </a:rPr>
-              <a:t>None of this needs a GPU, a licence, or a request to IT. Model names move faster than syllabi - the architecture on slide 20 does not.</a:t>
+              <a:t>None of this needs a GPU, a licence, or a request to IT. Model names move faster than syllabi - the architecture on slide 20 does not. Model list current as of August 2026.</a:t>
             </a:r>
             <a:endParaRPr lang="en-US" sz="1500" dirty="0"/>
           </a:p>
@@ -27621,9 +27873,762 @@
                 <a:ea typeface="Arial" pitchFamily="34" charset="-122"/>
                 <a:cs typeface="Arial" pitchFamily="34" charset="-120"/>
               </a:rPr>
-              <a:t>Names move every few months. Slide 22 tells you how to choose; this only says what to try.</a:t>
+              <a:t>Names move every few months. Slide 22 tells you how to choose; this only says what to try. Current as of August 2026.</a:t>
             </a:r>
             <a:endParaRPr lang="en-US" sz="1600" dirty="0"/>
+          </a:p>
+        </p:txBody>
+      </p:sp>
+    </p:spTree>
+  </p:cSld>
+  <p:clrMapOvr>
+    <a:masterClrMapping/>
+  </p:clrMapOvr>
+</p:sld>
+</file>
+
+<file path=ppt/slides/slide37.xml><?xml version="1.0" encoding="utf-8"?>
+<p:sld xmlns:a="http://schemas.openxmlformats.org/drawingml/2006/main" xmlns:r="http://schemas.openxmlformats.org/officeDocument/2006/relationships" xmlns:p="http://schemas.openxmlformats.org/presentationml/2006/main">
+  <p:cSld name="Slide 5">
+    <p:bg>
+      <p:bgPr>
+        <a:solidFill>
+          <a:srgbClr val="FFFFFF"/>
+        </a:solidFill>
+        <a:effectLst/>
+      </p:bgPr>
+    </p:bg>
+    <p:spTree>
+      <p:nvGrpSpPr>
+        <p:cNvPr id="1" name=""/>
+        <p:cNvGrpSpPr/>
+        <p:nvPr/>
+      </p:nvGrpSpPr>
+      <p:grpSpPr>
+        <a:xfrm>
+          <a:off x="0" y="0"/>
+          <a:ext cx="0" cy="0"/>
+          <a:chOff x="0" y="0"/>
+          <a:chExt cx="0" cy="0"/>
+        </a:xfrm>
+      </p:grpSpPr>
+      <p:sp>
+        <p:nvSpPr>
+          <p:cNvPr id="2" name="Text 0"/>
+          <p:cNvSpPr/>
+          <p:nvPr/>
+        </p:nvSpPr>
+        <p:spPr>
+          <a:xfrm>
+            <a:off x="640080" y="384048"/>
+            <a:ext cx="10908792" cy="237744"/>
+          </a:xfrm>
+          <a:prstGeom prst="rect">
+            <a:avLst/>
+          </a:prstGeom>
+          <a:noFill/>
+          <a:ln/>
+        </p:spPr>
+        <p:txBody>
+          <a:bodyPr wrap="square" lIns="0" tIns="0" rIns="0" bIns="0" rtlCol="0" anchor="ctr"/>
+          <a:lstStyle/>
+          <a:p>
+            <a:pPr marL="0" indent="0">
+              <a:buNone/>
+            </a:pPr>
+            <a:r>
+              <a:rPr lang="en-US" sz="1100" b="1" kern="0" spc="200" dirty="0">
+                <a:solidFill>
+                  <a:srgbClr val="FF6B4A"/>
+                </a:solidFill>
+                <a:latin typeface="Arial" pitchFamily="34" charset="0"/>
+                <a:ea typeface="Arial" pitchFamily="34" charset="-122"/>
+                <a:cs typeface="Arial" pitchFamily="34" charset="-120"/>
+              </a:rPr>
+              <a:t>APPENDIX - EVALUATION</a:t>
+            </a:r>
+            <a:endParaRPr lang="en-US" sz="1100" dirty="0"/>
+          </a:p>
+        </p:txBody>
+      </p:sp>
+      <p:sp>
+        <p:nvSpPr>
+          <p:cNvPr id="3" name="Text 1"/>
+          <p:cNvSpPr/>
+          <p:nvPr/>
+        </p:nvSpPr>
+        <p:spPr>
+          <a:xfrm>
+            <a:off x="640080" y="658368"/>
+            <a:ext cx="10908792" cy="658368"/>
+          </a:xfrm>
+          <a:prstGeom prst="rect">
+            <a:avLst/>
+          </a:prstGeom>
+          <a:noFill/>
+          <a:ln/>
+        </p:spPr>
+        <p:txBody>
+          <a:bodyPr wrap="square" lIns="0" tIns="0" rIns="0" bIns="0" rtlCol="0" anchor="t"/>
+          <a:lstStyle/>
+          <a:p>
+            <a:pPr marL="0" indent="0">
+              <a:buNone/>
+            </a:pPr>
+            <a:r>
+              <a:rPr lang="en-US" sz="3400" b="1" dirty="0">
+                <a:solidFill>
+                  <a:srgbClr val="0E1524"/>
+                </a:solidFill>
+                <a:latin typeface="Arial" pitchFamily="34" charset="0"/>
+                <a:ea typeface="Arial" pitchFamily="34" charset="-122"/>
+                <a:cs typeface="Arial" pitchFamily="34" charset="-120"/>
+              </a:rPr>
+              <a:t>How do we know it is actually good?</a:t>
+            </a:r>
+            <a:endParaRPr lang="en-US" sz="3400" dirty="0"/>
+          </a:p>
+        </p:txBody>
+      </p:sp>
+      <p:sp>
+        <p:nvSpPr>
+          <p:cNvPr id="4" name="Text 2"/>
+          <p:cNvSpPr/>
+          <p:nvPr/>
+        </p:nvSpPr>
+        <p:spPr>
+          <a:xfrm>
+            <a:off x="640080" y="1481328"/>
+            <a:ext cx="9601200" cy="274320"/>
+          </a:xfrm>
+          <a:prstGeom prst="rect">
+            <a:avLst/>
+          </a:prstGeom>
+          <a:noFill/>
+          <a:ln/>
+        </p:spPr>
+        <p:txBody>
+          <a:bodyPr wrap="square" lIns="0" tIns="0" rIns="0" bIns="0" rtlCol="0" anchor="ctr"/>
+          <a:lstStyle/>
+          <a:p>
+            <a:pPr marL="0" indent="0">
+              <a:buNone/>
+            </a:pPr>
+            <a:r>
+              <a:rPr lang="en-US" sz="1400" dirty="0">
+                <a:solidFill>
+                  <a:srgbClr val="6B7689"/>
+                </a:solidFill>
+                <a:latin typeface="Calibri" pitchFamily="34" charset="0"/>
+                <a:ea typeface="Calibri" pitchFamily="34" charset="-122"/>
+                <a:cs typeface="Calibri" pitchFamily="34" charset="-120"/>
+              </a:rPr>
+              <a:t>Four families of metric. A proposal that names one from each is already ahead of most.</a:t>
+            </a:r>
+            <a:endParaRPr lang="en-US" sz="1400" dirty="0"/>
+          </a:p>
+        </p:txBody>
+      </p:sp>
+      <p:sp>
+        <p:nvSpPr>
+          <p:cNvPr id="5" name="Shape 3"/>
+          <p:cNvSpPr/>
+          <p:nvPr/>
+        </p:nvSpPr>
+        <p:spPr>
+          <a:xfrm>
+            <a:off x="640080" y="2011680"/>
+            <a:ext cx="2514600" cy="2286000"/>
+          </a:xfrm>
+          <a:prstGeom prst="roundRect">
+            <a:avLst>
+              <a:gd name="adj" fmla="val 3600"/>
+            </a:avLst>
+          </a:prstGeom>
+          <a:solidFill>
+            <a:srgbClr val="F4F6FA"/>
+          </a:solidFill>
+          <a:ln/>
+          <a:effectLst>
+            <a:outerShdw blurRad="101600" dist="12700" dir="5400000" algn="bl" rotWithShape="0">
+              <a:srgbClr val="9AA6B8">
+                <a:alpha val="18000"/>
+              </a:srgbClr>
+            </a:outerShdw>
+          </a:effectLst>
+        </p:spPr>
+        <p:txBody>
+          <a:bodyPr/>
+          <a:lstStyle/>
+          <a:p>
+            <a:endParaRPr lang="en-IN"/>
+          </a:p>
+        </p:txBody>
+      </p:sp>
+      <p:sp>
+        <p:nvSpPr>
+          <p:cNvPr id="6" name="Shape 4"/>
+          <p:cNvSpPr/>
+          <p:nvPr/>
+        </p:nvSpPr>
+        <p:spPr>
+          <a:xfrm>
+            <a:off x="932688" y="2331720"/>
+            <a:ext cx="457200" cy="457200"/>
+          </a:xfrm>
+          <a:prstGeom prst="ellipse">
+            <a:avLst/>
+          </a:prstGeom>
+          <a:solidFill>
+            <a:srgbClr val="00C2A8"/>
+          </a:solidFill>
+          <a:ln/>
+        </p:spPr>
+        <p:txBody>
+          <a:bodyPr/>
+          <a:lstStyle/>
+          <a:p>
+            <a:endParaRPr lang="en-IN"/>
+          </a:p>
+        </p:txBody>
+      </p:sp>
+      <p:sp>
+        <p:nvSpPr>
+          <p:cNvPr id="7" name="Text 5"/>
+          <p:cNvSpPr/>
+          <p:nvPr/>
+        </p:nvSpPr>
+        <p:spPr>
+          <a:xfrm>
+            <a:off x="932688" y="2971800"/>
+            <a:ext cx="2011680" cy="320040"/>
+          </a:xfrm>
+          <a:prstGeom prst="rect">
+            <a:avLst/>
+          </a:prstGeom>
+          <a:noFill/>
+          <a:ln/>
+        </p:spPr>
+        <p:txBody>
+          <a:bodyPr wrap="square" lIns="0" tIns="0" rIns="0" bIns="0" rtlCol="0" anchor="ctr"/>
+          <a:lstStyle/>
+          <a:p>
+            <a:pPr marL="0" indent="0">
+              <a:buNone/>
+            </a:pPr>
+            <a:r>
+              <a:rPr lang="en-US" sz="1900" b="1" dirty="0">
+                <a:solidFill>
+                  <a:srgbClr val="0E1524"/>
+                </a:solidFill>
+                <a:latin typeface="Arial" pitchFamily="34" charset="0"/>
+                <a:ea typeface="Arial" pitchFamily="34" charset="-122"/>
+                <a:cs typeface="Arial" pitchFamily="34" charset="-120"/>
+              </a:rPr>
+              <a:t>Task quality</a:t>
+            </a:r>
+            <a:endParaRPr lang="en-US" sz="1900" dirty="0"/>
+          </a:p>
+        </p:txBody>
+      </p:sp>
+      <p:sp>
+        <p:nvSpPr>
+          <p:cNvPr id="8" name="Text 6"/>
+          <p:cNvSpPr/>
+          <p:nvPr/>
+        </p:nvSpPr>
+        <p:spPr>
+          <a:xfrm>
+            <a:off x="932688" y="3364992"/>
+            <a:ext cx="1920240" cy="777240"/>
+          </a:xfrm>
+          <a:prstGeom prst="rect">
+            <a:avLst/>
+          </a:prstGeom>
+          <a:noFill/>
+          <a:ln/>
+        </p:spPr>
+        <p:txBody>
+          <a:bodyPr wrap="square" lIns="0" tIns="0" rIns="0" bIns="0" rtlCol="0" anchor="ctr"/>
+          <a:lstStyle/>
+          <a:p>
+            <a:pPr marL="0" indent="0">
+              <a:buNone/>
+            </a:pPr>
+            <a:r>
+              <a:rPr lang="en-US" sz="1250" dirty="0">
+                <a:solidFill>
+                  <a:srgbClr val="6B7689"/>
+                </a:solidFill>
+                <a:latin typeface="Calibri" pitchFamily="34" charset="0"/>
+                <a:ea typeface="Calibri" pitchFamily="34" charset="-122"/>
+                <a:cs typeface="Calibri" pitchFamily="34" charset="-120"/>
+              </a:rPr>
+              <a:t>Accuracy, precision, recall, F1. Exact match and field-level extraction accuracy.</a:t>
+            </a:r>
+            <a:endParaRPr lang="en-US" sz="1250" dirty="0"/>
+          </a:p>
+        </p:txBody>
+      </p:sp>
+      <p:sp>
+        <p:nvSpPr>
+          <p:cNvPr id="9" name="Shape 7"/>
+          <p:cNvSpPr/>
+          <p:nvPr/>
+        </p:nvSpPr>
+        <p:spPr>
+          <a:xfrm>
+            <a:off x="3410712" y="2011680"/>
+            <a:ext cx="2514600" cy="2286000"/>
+          </a:xfrm>
+          <a:prstGeom prst="roundRect">
+            <a:avLst>
+              <a:gd name="adj" fmla="val 3600"/>
+            </a:avLst>
+          </a:prstGeom>
+          <a:solidFill>
+            <a:srgbClr val="F4F6FA"/>
+          </a:solidFill>
+          <a:ln/>
+          <a:effectLst>
+            <a:outerShdw blurRad="101600" dist="12700" dir="5400000" algn="bl" rotWithShape="0">
+              <a:srgbClr val="9AA6B8">
+                <a:alpha val="18000"/>
+              </a:srgbClr>
+            </a:outerShdw>
+          </a:effectLst>
+        </p:spPr>
+        <p:txBody>
+          <a:bodyPr/>
+          <a:lstStyle/>
+          <a:p>
+            <a:endParaRPr lang="en-IN"/>
+          </a:p>
+        </p:txBody>
+      </p:sp>
+      <p:sp>
+        <p:nvSpPr>
+          <p:cNvPr id="10" name="Shape 8"/>
+          <p:cNvSpPr/>
+          <p:nvPr/>
+        </p:nvSpPr>
+        <p:spPr>
+          <a:xfrm>
+            <a:off x="3703320" y="2331720"/>
+            <a:ext cx="457200" cy="457200"/>
+          </a:xfrm>
+          <a:prstGeom prst="ellipse">
+            <a:avLst/>
+          </a:prstGeom>
+          <a:solidFill>
+            <a:srgbClr val="FF6B4A"/>
+          </a:solidFill>
+          <a:ln/>
+        </p:spPr>
+        <p:txBody>
+          <a:bodyPr/>
+          <a:lstStyle/>
+          <a:p>
+            <a:endParaRPr lang="en-IN"/>
+          </a:p>
+        </p:txBody>
+      </p:sp>
+      <p:sp>
+        <p:nvSpPr>
+          <p:cNvPr id="11" name="Text 9"/>
+          <p:cNvSpPr/>
+          <p:nvPr/>
+        </p:nvSpPr>
+        <p:spPr>
+          <a:xfrm>
+            <a:off x="3703320" y="2971800"/>
+            <a:ext cx="2011680" cy="320040"/>
+          </a:xfrm>
+          <a:prstGeom prst="rect">
+            <a:avLst/>
+          </a:prstGeom>
+          <a:noFill/>
+          <a:ln/>
+        </p:spPr>
+        <p:txBody>
+          <a:bodyPr wrap="square" lIns="0" tIns="0" rIns="0" bIns="0" rtlCol="0" anchor="ctr"/>
+          <a:lstStyle/>
+          <a:p>
+            <a:pPr marL="0" indent="0">
+              <a:buNone/>
+            </a:pPr>
+            <a:r>
+              <a:rPr lang="en-US" sz="1900" b="1" dirty="0">
+                <a:solidFill>
+                  <a:srgbClr val="0E1524"/>
+                </a:solidFill>
+                <a:latin typeface="Arial" pitchFamily="34" charset="0"/>
+                <a:ea typeface="Arial" pitchFamily="34" charset="-122"/>
+                <a:cs typeface="Arial" pitchFamily="34" charset="-120"/>
+              </a:rPr>
+              <a:t>Cross-modal</a:t>
+            </a:r>
+            <a:endParaRPr lang="en-US" sz="1900" dirty="0"/>
+          </a:p>
+        </p:txBody>
+      </p:sp>
+      <p:sp>
+        <p:nvSpPr>
+          <p:cNvPr id="12" name="Text 10"/>
+          <p:cNvSpPr/>
+          <p:nvPr/>
+        </p:nvSpPr>
+        <p:spPr>
+          <a:xfrm>
+            <a:off x="3703320" y="3364992"/>
+            <a:ext cx="1920240" cy="777240"/>
+          </a:xfrm>
+          <a:prstGeom prst="rect">
+            <a:avLst/>
+          </a:prstGeom>
+          <a:noFill/>
+          <a:ln/>
+        </p:spPr>
+        <p:txBody>
+          <a:bodyPr wrap="square" lIns="0" tIns="0" rIns="0" bIns="0" rtlCol="0" anchor="ctr"/>
+          <a:lstStyle/>
+          <a:p>
+            <a:pPr marL="0" indent="0">
+              <a:buNone/>
+            </a:pPr>
+            <a:r>
+              <a:rPr lang="en-US" sz="1250" dirty="0">
+                <a:solidFill>
+                  <a:srgbClr val="6B7689"/>
+                </a:solidFill>
+                <a:latin typeface="Calibri" pitchFamily="34" charset="0"/>
+                <a:ea typeface="Calibri" pitchFamily="34" charset="-122"/>
+                <a:cs typeface="Calibri" pitchFamily="34" charset="-120"/>
+              </a:rPr>
+              <a:t>Alignment accuracy, evidence grounding, and per-modality ablation.</a:t>
+            </a:r>
+            <a:endParaRPr lang="en-US" sz="1250" dirty="0"/>
+          </a:p>
+        </p:txBody>
+      </p:sp>
+      <p:sp>
+        <p:nvSpPr>
+          <p:cNvPr id="13" name="Shape 11"/>
+          <p:cNvSpPr/>
+          <p:nvPr/>
+        </p:nvSpPr>
+        <p:spPr>
+          <a:xfrm>
+            <a:off x="6181344" y="2011680"/>
+            <a:ext cx="2514600" cy="2286000"/>
+          </a:xfrm>
+          <a:prstGeom prst="roundRect">
+            <a:avLst>
+              <a:gd name="adj" fmla="val 3600"/>
+            </a:avLst>
+          </a:prstGeom>
+          <a:solidFill>
+            <a:srgbClr val="F4F6FA"/>
+          </a:solidFill>
+          <a:ln/>
+          <a:effectLst>
+            <a:outerShdw blurRad="101600" dist="12700" dir="5400000" algn="bl" rotWithShape="0">
+              <a:srgbClr val="9AA6B8">
+                <a:alpha val="18000"/>
+              </a:srgbClr>
+            </a:outerShdw>
+          </a:effectLst>
+        </p:spPr>
+        <p:txBody>
+          <a:bodyPr/>
+          <a:lstStyle/>
+          <a:p>
+            <a:endParaRPr lang="en-IN"/>
+          </a:p>
+        </p:txBody>
+      </p:sp>
+      <p:sp>
+        <p:nvSpPr>
+          <p:cNvPr id="14" name="Shape 12"/>
+          <p:cNvSpPr/>
+          <p:nvPr/>
+        </p:nvSpPr>
+        <p:spPr>
+          <a:xfrm>
+            <a:off x="6473952" y="2331720"/>
+            <a:ext cx="457200" cy="457200"/>
+          </a:xfrm>
+          <a:prstGeom prst="ellipse">
+            <a:avLst/>
+          </a:prstGeom>
+          <a:solidFill>
+            <a:srgbClr val="FFC24A"/>
+          </a:solidFill>
+          <a:ln/>
+        </p:spPr>
+        <p:txBody>
+          <a:bodyPr/>
+          <a:lstStyle/>
+          <a:p>
+            <a:endParaRPr lang="en-IN"/>
+          </a:p>
+        </p:txBody>
+      </p:sp>
+      <p:sp>
+        <p:nvSpPr>
+          <p:cNvPr id="15" name="Text 13"/>
+          <p:cNvSpPr/>
+          <p:nvPr/>
+        </p:nvSpPr>
+        <p:spPr>
+          <a:xfrm>
+            <a:off x="6473952" y="2971800"/>
+            <a:ext cx="2011680" cy="320040"/>
+          </a:xfrm>
+          <a:prstGeom prst="rect">
+            <a:avLst/>
+          </a:prstGeom>
+          <a:noFill/>
+          <a:ln/>
+        </p:spPr>
+        <p:txBody>
+          <a:bodyPr wrap="square" lIns="0" tIns="0" rIns="0" bIns="0" rtlCol="0" anchor="ctr"/>
+          <a:lstStyle/>
+          <a:p>
+            <a:pPr marL="0" indent="0">
+              <a:buNone/>
+            </a:pPr>
+            <a:r>
+              <a:rPr lang="en-US" sz="1900" b="1" dirty="0">
+                <a:solidFill>
+                  <a:srgbClr val="0E1524"/>
+                </a:solidFill>
+                <a:latin typeface="Arial" pitchFamily="34" charset="0"/>
+                <a:ea typeface="Arial" pitchFamily="34" charset="-122"/>
+                <a:cs typeface="Arial" pitchFamily="34" charset="-120"/>
+              </a:rPr>
+              <a:t>Trust</a:t>
+            </a:r>
+            <a:endParaRPr lang="en-US" sz="1900" dirty="0"/>
+          </a:p>
+        </p:txBody>
+      </p:sp>
+      <p:sp>
+        <p:nvSpPr>
+          <p:cNvPr id="16" name="Text 14"/>
+          <p:cNvSpPr/>
+          <p:nvPr/>
+        </p:nvSpPr>
+        <p:spPr>
+          <a:xfrm>
+            <a:off x="6473952" y="3364992"/>
+            <a:ext cx="1920240" cy="777240"/>
+          </a:xfrm>
+          <a:prstGeom prst="rect">
+            <a:avLst/>
+          </a:prstGeom>
+          <a:noFill/>
+          <a:ln/>
+        </p:spPr>
+        <p:txBody>
+          <a:bodyPr wrap="square" lIns="0" tIns="0" rIns="0" bIns="0" rtlCol="0" anchor="ctr"/>
+          <a:lstStyle/>
+          <a:p>
+            <a:pPr marL="0" indent="0">
+              <a:buNone/>
+            </a:pPr>
+            <a:r>
+              <a:rPr lang="en-US" sz="1250" dirty="0">
+                <a:solidFill>
+                  <a:srgbClr val="6B7689"/>
+                </a:solidFill>
+                <a:latin typeface="Calibri" pitchFamily="34" charset="0"/>
+                <a:ea typeface="Calibri" pitchFamily="34" charset="-122"/>
+                <a:cs typeface="Calibri" pitchFamily="34" charset="-120"/>
+              </a:rPr>
+              <a:t>Calibration error, hallucination rate, abstention and selective risk.</a:t>
+            </a:r>
+            <a:endParaRPr lang="en-US" sz="1250" dirty="0"/>
+          </a:p>
+        </p:txBody>
+      </p:sp>
+      <p:sp>
+        <p:nvSpPr>
+          <p:cNvPr id="17" name="Shape 15"/>
+          <p:cNvSpPr/>
+          <p:nvPr/>
+        </p:nvSpPr>
+        <p:spPr>
+          <a:xfrm>
+            <a:off x="8951976" y="2011680"/>
+            <a:ext cx="2514600" cy="2286000"/>
+          </a:xfrm>
+          <a:prstGeom prst="roundRect">
+            <a:avLst>
+              <a:gd name="adj" fmla="val 3600"/>
+            </a:avLst>
+          </a:prstGeom>
+          <a:solidFill>
+            <a:srgbClr val="F4F6FA"/>
+          </a:solidFill>
+          <a:ln/>
+          <a:effectLst>
+            <a:outerShdw blurRad="101600" dist="12700" dir="5400000" algn="bl" rotWithShape="0">
+              <a:srgbClr val="9AA6B8">
+                <a:alpha val="18000"/>
+              </a:srgbClr>
+            </a:outerShdw>
+          </a:effectLst>
+        </p:spPr>
+        <p:txBody>
+          <a:bodyPr/>
+          <a:lstStyle/>
+          <a:p>
+            <a:endParaRPr lang="en-IN"/>
+          </a:p>
+        </p:txBody>
+      </p:sp>
+      <p:sp>
+        <p:nvSpPr>
+          <p:cNvPr id="18" name="Shape 16"/>
+          <p:cNvSpPr/>
+          <p:nvPr/>
+        </p:nvSpPr>
+        <p:spPr>
+          <a:xfrm>
+            <a:off x="9244584" y="2331720"/>
+            <a:ext cx="457200" cy="457200"/>
+          </a:xfrm>
+          <a:prstGeom prst="ellipse">
+            <a:avLst/>
+          </a:prstGeom>
+          <a:solidFill>
+            <a:srgbClr val="6B7689"/>
+          </a:solidFill>
+          <a:ln/>
+        </p:spPr>
+        <p:txBody>
+          <a:bodyPr/>
+          <a:lstStyle/>
+          <a:p>
+            <a:endParaRPr lang="en-IN"/>
+          </a:p>
+        </p:txBody>
+      </p:sp>
+      <p:sp>
+        <p:nvSpPr>
+          <p:cNvPr id="19" name="Text 17"/>
+          <p:cNvSpPr/>
+          <p:nvPr/>
+        </p:nvSpPr>
+        <p:spPr>
+          <a:xfrm>
+            <a:off x="9244584" y="2971800"/>
+            <a:ext cx="2011680" cy="320040"/>
+          </a:xfrm>
+          <a:prstGeom prst="rect">
+            <a:avLst/>
+          </a:prstGeom>
+          <a:noFill/>
+          <a:ln/>
+        </p:spPr>
+        <p:txBody>
+          <a:bodyPr wrap="square" lIns="0" tIns="0" rIns="0" bIns="0" rtlCol="0" anchor="ctr"/>
+          <a:lstStyle/>
+          <a:p>
+            <a:pPr marL="0" indent="0">
+              <a:buNone/>
+            </a:pPr>
+            <a:r>
+              <a:rPr lang="en-US" sz="1900" b="1" dirty="0">
+                <a:solidFill>
+                  <a:srgbClr val="0E1524"/>
+                </a:solidFill>
+                <a:latin typeface="Arial" pitchFamily="34" charset="0"/>
+                <a:ea typeface="Arial" pitchFamily="34" charset="-122"/>
+                <a:cs typeface="Arial" pitchFamily="34" charset="-120"/>
+              </a:rPr>
+              <a:t>Engineering</a:t>
+            </a:r>
+            <a:endParaRPr lang="en-US" sz="1900" dirty="0"/>
+          </a:p>
+        </p:txBody>
+      </p:sp>
+      <p:sp>
+        <p:nvSpPr>
+          <p:cNvPr id="20" name="Text 18"/>
+          <p:cNvSpPr/>
+          <p:nvPr/>
+        </p:nvSpPr>
+        <p:spPr>
+          <a:xfrm>
+            <a:off x="9244584" y="3364992"/>
+            <a:ext cx="1920240" cy="777240"/>
+          </a:xfrm>
+          <a:prstGeom prst="rect">
+            <a:avLst/>
+          </a:prstGeom>
+          <a:noFill/>
+          <a:ln/>
+        </p:spPr>
+        <p:txBody>
+          <a:bodyPr wrap="square" lIns="0" tIns="0" rIns="0" bIns="0" rtlCol="0" anchor="ctr"/>
+          <a:lstStyle/>
+          <a:p>
+            <a:pPr marL="0" indent="0">
+              <a:buNone/>
+            </a:pPr>
+            <a:r>
+              <a:rPr lang="en-US" sz="1250" dirty="0">
+                <a:solidFill>
+                  <a:srgbClr val="6B7689"/>
+                </a:solidFill>
+                <a:latin typeface="Calibri" pitchFamily="34" charset="0"/>
+                <a:ea typeface="Calibri" pitchFamily="34" charset="-122"/>
+                <a:cs typeface="Calibri" pitchFamily="34" charset="-120"/>
+              </a:rPr>
+              <a:t>Latency, cost per successful task, throughput at peak load.</a:t>
+            </a:r>
+            <a:endParaRPr lang="en-US" sz="1250" dirty="0"/>
+          </a:p>
+        </p:txBody>
+      </p:sp>
+      <p:sp>
+        <p:nvSpPr>
+          <p:cNvPr id="21" name="Text 19"/>
+          <p:cNvSpPr/>
+          <p:nvPr/>
+        </p:nvSpPr>
+        <p:spPr>
+          <a:xfrm>
+            <a:off x="640080" y="4709160"/>
+            <a:ext cx="10908792" cy="548640"/>
+          </a:xfrm>
+          <a:prstGeom prst="rect">
+            <a:avLst/>
+          </a:prstGeom>
+          <a:noFill/>
+          <a:ln/>
+        </p:spPr>
+        <p:txBody>
+          <a:bodyPr wrap="square" lIns="0" tIns="0" rIns="0" bIns="0" rtlCol="0" anchor="ctr"/>
+          <a:lstStyle/>
+          <a:p>
+            <a:pPr marL="0" indent="0">
+              <a:buNone/>
+            </a:pPr>
+            <a:r>
+              <a:rPr lang="en-US" sz="1500" i="1" dirty="0">
+                <a:solidFill>
+                  <a:srgbClr val="0E1524"/>
+                </a:solidFill>
+                <a:latin typeface="Calibri" pitchFamily="34" charset="0"/>
+                <a:ea typeface="Calibri" pitchFamily="34" charset="-122"/>
+                <a:cs typeface="Calibri" pitchFamily="34" charset="-120"/>
+              </a:rPr>
+              <a:t>Report the engineering numbers next to the accuracy numbers. A system that is right and unaffordable has not been evaluated.</a:t>
+            </a:r>
+            <a:endParaRPr lang="en-US" sz="1500" dirty="0"/>
           </a:p>
         </p:txBody>
       </p:sp>
@@ -29512,6 +30517,120 @@
               <a:t>Multimodal AI is not four models in a trench coat. It is one model that was trained so that all four of these land in the same representational space.</a:t>
             </a:r>
             <a:endParaRPr lang="en-US" sz="1500" dirty="0"/>
+          </a:p>
+        </p:txBody>
+      </p:sp>
+      <p:sp>
+        <p:nvSpPr>
+          <p:cNvPr id="5" name="Shape 3"/>
+          <p:cNvSpPr/>
+          <p:nvPr/>
+        </p:nvSpPr>
+        <p:spPr>
+          <a:xfrm>
+            <a:off x="640080" y="5330000"/>
+            <a:ext cx="10908792" cy="1005840"/>
+          </a:xfrm>
+          <a:prstGeom prst="roundRect">
+            <a:avLst>
+              <a:gd name="adj" fmla="val 3600"/>
+            </a:avLst>
+          </a:prstGeom>
+          <a:solidFill>
+            <a:srgbClr val="F4F6FA"/>
+          </a:solidFill>
+          <a:ln/>
+          <a:effectLst>
+            <a:outerShdw blurRad="101600" dist="12700" dir="5400000" algn="bl" rotWithShape="0">
+              <a:srgbClr val="9AA6B8">
+                <a:alpha val="18000"/>
+              </a:srgbClr>
+            </a:outerShdw>
+          </a:effectLst>
+        </p:spPr>
+        <p:txBody>
+          <a:bodyPr/>
+          <a:lstStyle/>
+          <a:p>
+            <a:endParaRPr lang="en-IN"/>
+          </a:p>
+        </p:txBody>
+      </p:sp>
+      <p:sp>
+        <p:nvSpPr>
+          <p:cNvPr id="4" name="Text 2"/>
+          <p:cNvSpPr/>
+          <p:nvPr/>
+        </p:nvSpPr>
+        <p:spPr>
+          <a:xfrm>
+            <a:off x="1005840" y="5470000"/>
+            <a:ext cx="10149840" cy="500000"/>
+          </a:xfrm>
+          <a:prstGeom prst="rect">
+            <a:avLst/>
+          </a:prstGeom>
+          <a:noFill/>
+          <a:ln/>
+        </p:spPr>
+        <p:txBody>
+          <a:bodyPr wrap="square" lIns="0" tIns="0" rIns="0" bIns="0" rtlCol="0" anchor="ctr"/>
+          <a:lstStyle/>
+          <a:p>
+            <a:pPr marL="0" indent="0">
+              <a:buNone/>
+            </a:pPr>
+            <a:r>
+              <a:rPr lang="en-US" sz="1400" dirty="0">
+                <a:solidFill>
+                  <a:srgbClr val="0E1524"/>
+                </a:solidFill>
+                <a:latin typeface="Calibri" pitchFamily="34" charset="0"/>
+                <a:ea typeface="Calibri" pitchFamily="34" charset="-122"/>
+                <a:cs typeface="Calibri" pitchFamily="34" charset="-120"/>
+              </a:rPr>
+              <a:t>Multimodal AI enables a single system to jointly process, align and reason across two or more modalities - text, images, audio, video, structured data - and to produce one grounded output.</a:t>
+            </a:r>
+            <a:endParaRPr lang="en-US" sz="1400" dirty="0"/>
+          </a:p>
+        </p:txBody>
+      </p:sp>
+      <p:sp>
+        <p:nvSpPr>
+          <p:cNvPr id="4" name="Text 2"/>
+          <p:cNvSpPr/>
+          <p:nvPr/>
+        </p:nvSpPr>
+        <p:spPr>
+          <a:xfrm>
+            <a:off x="1005840" y="6030000"/>
+            <a:ext cx="10149840" cy="230000"/>
+          </a:xfrm>
+          <a:prstGeom prst="rect">
+            <a:avLst/>
+          </a:prstGeom>
+          <a:noFill/>
+          <a:ln/>
+        </p:spPr>
+        <p:txBody>
+          <a:bodyPr wrap="square" lIns="0" tIns="0" rIns="0" bIns="0" rtlCol="0" anchor="ctr"/>
+          <a:lstStyle/>
+          <a:p>
+            <a:pPr marL="0" indent="0">
+              <a:buNone/>
+            </a:pPr>
+            <a:r>
+              <a:rPr lang="en-US" sz="1100" dirty="0">
+                <a:solidFill>
+                  <a:srgbClr val="6B7689"/>
+                </a:solidFill>
+                <a:latin typeface="Calibri" pitchFamily="34" charset="0"/>
+                <a:ea typeface="Calibri" pitchFamily="34" charset="-122"/>
+                <a:cs typeface="Calibri" pitchFamily="34" charset="-120"/>
+              </a:rPr>
+              <a:t>This session is about understanding across modalities and the decisions that follow. Generation from prompts belongs to the NLP and generative AI session.</a:t>
+            </a:r>
+            <a:endParaRPr lang="en-US" sz="1400" dirty="0"/>
           </a:p>
         </p:txBody>
       </p:sp>

--- a/Multimodal-AI-ATAL-FDP-Deck.pptx
+++ b/Multimodal-AI-ATAL-FDP-Deck.pptx
@@ -1217,6 +1217,12 @@
               <a:t>Tell them the honest number: on clean typed documents this is production-ready today. On dense handwritten forms it is not. Do not oversell - the credibility you keep here pays off in the funding section. Local hook: every institution in this FDP has decades of undigitised records. That is a dataset nobody else has.</a:t>
             </a:r>
           </a:p>
+          <a:p/>
+          <a:p>
+            <a:r>
+              <a:t>The 0.94 in the JSON is the model’s own number, not a calibrated probability. Flag it here in one sentence so nobody leaves thinking the field can be trusted as a measurement.</a:t>
+            </a:r>
+          </a:p>
         </p:txBody>
       </p:sp>
       <p:sp>
@@ -1390,6 +1396,12 @@
               <a:t>This slide does double duty - it is the credibility slide and the topic-selection slide. Say the last line slowly, and tell them to photograph it. For an FDP room, this is the single most valuable slide in the deck: six research problems, all measurable, none needing a large GPU budget.</a:t>
             </a:r>
           </a:p>
+          <a:p/>
+          <a:p>
+            <a:r>
+              <a:t>Run the chat poll on the last line - it takes fifteen seconds and it gives you the room’s own failure case to name again on slide 25 and slide 34. Keep the tally; it is the cheapest way to make Part Four feel addressed to them.</a:t>
+            </a:r>
+          </a:p>
         </p:txBody>
       </p:sp>
       <p:sp>
@@ -1812,20 +1824,22 @@
               <a:t>This closes the loop on the opening slide - the room has been waiting 50 minutes for it. Take four minutes.</a:t>
             </a:r>
           </a:p>
-          <a:p>
-            <a:endParaRPr/>
-          </a:p>
+          <a:p/>
           <a:p>
             <a:r>
               <a:t>Three things to draw attention to. First, the video is sampled down to twelve frames, not streamed whole; that sampling decision is where most video pipelines quietly lose the event they were looking for, and it is on the honest slide as an open problem. Second, the model cites which modality supported its answer - that evidence field is what makes the output auditable, and reviewers of your papers will ask for it. Third, the system declines to decide: 0.81 under a 0.9 threshold means a human looks at it, and that is the difference between a demo and something an engineering department would sign off on.</a:t>
             </a:r>
           </a:p>
-          <a:p>
-            <a:endParaRPr/>
-          </a:p>
+          <a:p/>
           <a:p>
             <a:r>
               <a:t>If asked whether the model really understands the sensor trend: be honest. It reads a small table well and a long one badly. That is a research problem, not a secret.</a:t>
+            </a:r>
+          </a:p>
+          <a:p/>
+          <a:p>
+            <a:r>
+              <a:t>Say plainly that the 0.81 is self-reported and uncalibrated. Thresholding on it is a routing decision, not a guarantee - and making that number trustworthy is research problem 03 on slide 25. That admission is what separates this from a vendor demo.</a:t>
             </a:r>
           </a:p>
         </p:txBody>
@@ -2146,6 +2160,12 @@
           <a:p>
             <a:r>
               <a:t>The dataset-and-benchmark route is the most reliable first publication for a scholar without compute. Say it plainly, they rarely hear it. Point out that problem 02 is the one where a college in Tamil Nadu or Maharashtra has a structural advantage over a lab in California - they have the scripts, the forms and the speakers.</a:t>
+            </a:r>
+          </a:p>
+          <a:p/>
+          <a:p>
+            <a:r>
+              <a:t>If you polled the room on slide 17, name the winning failure here and point at the row and the measure it maps to. Fine spatial detail lands on row 05, long video on row 04.</a:t>
             </a:r>
           </a:p>
         </p:txBody>
@@ -6277,7 +6297,7 @@
                 <a:ea typeface="Calibri" pitchFamily="34" charset="-122"/>
                 <a:cs typeface="Calibri" pitchFamily="34" charset="-120"/>
               </a:rPr>
-              <a:t>The current default in production systems</a:t>
+              <a:t>Common today, alongside projected visual tokens</a:t>
             </a:r>
             <a:endParaRPr lang="en-US" sz="1250" dirty="0"/>
           </a:p>
@@ -10619,7 +10639,7 @@
                 <a:ea typeface="Calibri" pitchFamily="34" charset="-122"/>
                 <a:cs typeface="Calibri" pitchFamily="34" charset="-120"/>
               </a:rPr>
-              <a:t>If you are picking a research problem, pick one of these six. They are unsolved, they are measurable, and reviewers already agree they matter.</a:t>
+              <a:t>If you are picking a research problem, pick one of these six. They are unsolved, they are measurable, and reviewers already agree they matter. Which one is yours? Name it in the chat.</a:t>
             </a:r>
             <a:endParaRPr lang="en-US" sz="1450" dirty="0"/>
           </a:p>
@@ -13709,7 +13729,7 @@
                 <a:ea typeface="Calibri" pitchFamily="34" charset="-122"/>
                 <a:cs typeface="Calibri" pitchFamily="34" charset="-120"/>
               </a:rPr>
-              <a:t>Consent, PII, and where the file travels</a:t>
+              <a:t>Consent, PII, DPDP duties, and where the file travels</a:t>
             </a:r>
             <a:endParaRPr lang="en-US" sz="900" dirty="0"/>
           </a:p>
@@ -15512,6 +15532,45 @@
           </a:p>
         </p:txBody>
       </p:sp>
+      <p:sp>
+        <p:nvSpPr>
+          <p:cNvPr id="178" name="Text 178"/>
+          <p:cNvSpPr/>
+          <p:nvPr/>
+        </p:nvSpPr>
+        <p:spPr>
+          <a:xfrm>
+            <a:off x="7955280" y="4740000"/>
+            <a:ext cx="3593592" cy="200000"/>
+          </a:xfrm>
+          <a:prstGeom prst="rect">
+            <a:avLst/>
+          </a:prstGeom>
+          <a:noFill/>
+          <a:ln/>
+        </p:spPr>
+        <p:txBody>
+          <a:bodyPr wrap="square" lIns="0" tIns="0" rIns="0" bIns="0" rtlCol="0" anchor="ctr"/>
+          <a:lstStyle/>
+          <a:p>
+            <a:pPr marL="0" indent="0" algn="l">
+              <a:buNone/>
+            </a:pPr>
+            <a:r>
+              <a:rPr lang="en-US" sz="900" b="0" dirty="0">
+                <a:solidFill>
+                  <a:srgbClr val="6B7689"/>
+                </a:solidFill>
+                <a:latin typeface="Arial" pitchFamily="34" charset="0"/>
+                <a:ea typeface="Arial" pitchFamily="34" charset="-122"/>
+                <a:cs typeface="Arial" pitchFamily="34" charset="-120"/>
+              </a:rPr>
+              <a:t>Self-reported, not calibrated - see research problem 03</a:t>
+            </a:r>
+            <a:endParaRPr lang="en-US" sz="1050" dirty="0"/>
+          </a:p>
+        </p:txBody>
+      </p:sp>
     </p:spTree>
   </p:cSld>
   <p:clrMapOvr>
@@ -17869,7 +17928,7 @@
                 <a:ea typeface="Calibri" pitchFamily="34" charset="-122"/>
                 <a:cs typeface="Calibri" pitchFamily="34" charset="-120"/>
               </a:rPr>
-              <a:t>Build a hard, well-documented test set for a domain nobody has covered. Cheap to do, highly cited.</a:t>
+              <a:t>Build a hard, well-documented test set for a domain nobody has covered. Check DocVQA, ChartQA and MMMU first.</a:t>
             </a:r>
             <a:endParaRPr lang="en-US" sz="1250" dirty="0"/>
           </a:p>
@@ -18307,7 +18366,7 @@
                 <a:ea typeface="Calibri" pitchFamily="34" charset="-122"/>
                 <a:cs typeface="Calibri" pitchFamily="34" charset="-120"/>
               </a:rPr>
-              <a:t>Same accuracy at a fraction of the tokens. Good fit for a compute-constrained lab.</a:t>
+              <a:t>Same accuracy at a fraction of the tokens, and the way into long video. Fits a compute-constrained lab.</a:t>
             </a:r>
             <a:endParaRPr lang="en-US" sz="1250" dirty="0"/>
           </a:p>
@@ -18453,7 +18512,7 @@
                 <a:ea typeface="Calibri" pitchFamily="34" charset="-122"/>
                 <a:cs typeface="Calibri" pitchFamily="34" charset="-120"/>
               </a:rPr>
-              <a:t>Medical, agricultural or industrial imagery with expert-verified labels. Hard to get, hard to beat.</a:t>
+              <a:t>Medical, agricultural or industrial imagery with expert-verified labels, where fine spatial detail decides the answer.</a:t>
             </a:r>
             <a:endParaRPr lang="en-US" sz="1250" dirty="0"/>
           </a:p>
@@ -19460,7 +19519,7 @@
                 <a:ea typeface="Calibri" pitchFamily="34" charset="-122"/>
                 <a:cs typeface="Calibri" pitchFamily="34" charset="-120"/>
               </a:rPr>
-              <a:t>arXiv 2408.08632. A living index - 258 benchmarks by May 2026. Check before claiming novelty.</a:t>
+              <a:t>arXiv 2408.08632. The paper reviews 200 benchmarks and the index keeps growing. Check before claiming novelty.</a:t>
             </a:r>
             <a:endParaRPr lang="en-US" sz="1250" dirty="0"/>
           </a:p>
@@ -21203,7 +21262,7 @@
                 <a:ea typeface="Calibri" pitchFamily="34" charset="-122"/>
                 <a:cs typeface="Calibri" pitchFamily="34" charset="-120"/>
               </a:rPr>
-              <a:t>Replaced SERB under the ANRF Act 2023. ARG subsumes the old Core Research Grant and covers TRL 1 to 6. Annual call.</a:t>
+              <a:t>Replaced SERB under the ANRF Act 2023. ARG subsumes the old Core Research Grant, covers TRL 1 to 6 and funds up to Rs 5 crore. The 2026 pre-proposal window closed on 10 June; the next opens around May.</a:t>
             </a:r>
             <a:endParaRPr lang="en-US" sz="1250" dirty="0"/>
           </a:p>
@@ -21376,7 +21435,7 @@
                 <a:ea typeface="Calibri" pitchFamily="34" charset="-122"/>
                 <a:cs typeface="Calibri" pitchFamily="34" charset="-120"/>
               </a:rPr>
-              <a:t>Built for industry-academia pairs. The 70 percent private-contribution model means a company partner strengthens your case.</a:t>
+              <a:t>Built for industry-academia pairs. ANRF’s corpus is designed to be majority non-government funded, so a company partner fits the model and strengthens your case.</a:t>
             </a:r>
             <a:endParaRPr lang="en-US" sz="1250" dirty="0"/>
           </a:p>
@@ -21549,7 +21608,7 @@
                 <a:ea typeface="Calibri" pitchFamily="34" charset="-122"/>
                 <a:cs typeface="Calibri" pitchFamily="34" charset="-120"/>
               </a:rPr>
-              <a:t>Over 38,000 GPUs across 14 empanelled providers, about Rs 65 per GPU-hour on average and Rs 92 for H100 class. Academic institutions are explicitly eligible. Register before you need it.</a:t>
+              <a:t>About 38,000 GPUs onboarded from 14 empanelled providers, roughly Rs 65 per GPU-hour on average and Rs 92 for H100 class, with a further 20,000 announced under Mission 2.0. Academic institutions are explicitly eligible - register before you need it.</a:t>
             </a:r>
             <a:endParaRPr lang="en-US" sz="1250" dirty="0"/>
           </a:p>
@@ -23434,7 +23493,7 @@
                 <a:ea typeface="Calibri" pitchFamily="34" charset="-122"/>
                 <a:cs typeface="Calibri" pitchFamily="34" charset="-120"/>
               </a:rPr>
-              <a:t>Your own admission forms, lab records or field photographs. Data no one else has.</a:t>
+              <a:t>Your own admission forms, lab records or field photographs. Data no one else has - clear consent and anonymise first.</a:t>
             </a:r>
             <a:endParaRPr lang="en-US" sz="1200" dirty="0"/>
           </a:p>
@@ -27154,7 +27213,7 @@
                 <a:ea typeface="Calibri" pitchFamily="34" charset="-122"/>
                 <a:cs typeface="Calibri" pitchFamily="34" charset="-120"/>
               </a:rPr>
-              <a:t>Qwen3-VL, InternVL, MiniCPM-V</a:t>
+              <a:t>Qwen3-VL, InternVL, GLM-4.6V, MiniCPM-V</a:t>
             </a:r>
             <a:endParaRPr lang="en-US" sz="1000" dirty="0"/>
           </a:p>
